--- a/Kelompok5_Wisata_Pulau_Jawa.pptx
+++ b/Kelompok5_Wisata_Pulau_Jawa.pptx
@@ -4362,12 +4362,12 @@
               <a:buNone/>
             </a:pPr>
             <a:r>
-              <a:rPr lang="en-US" sz="1200" b="1" dirty="0" err="1">
+              <a:rPr lang="en-US" sz="1200" b="1" dirty="0">
                 <a:solidFill>
                   <a:srgbClr val="1B4332"/>
                 </a:solidFill>
               </a:rPr>
-              <a:t>SharedPreferences</a:t>
+              <a:t>Firebase</a:t>
             </a:r>
             <a:endParaRPr lang="en-US" sz="1200" dirty="0"/>
           </a:p>
